--- a/curriculum/M01/W05/L02/slides.pptx
+++ b/curriculum/M01/W05/L02/slides.pptx
@@ -23672,11 +23672,40 @@
                 <a:ea typeface="Malgun Gothic"/>
                 <a:cs typeface="Malgun Gothic"/>
               </a:rPr>
-              <a:t>: 물리적 손상과 효소에 의한 분해를 막는다. 소화관 상피가 자기 소화 효소에 녹지 않는 이유 가운데 하나다. 2. </a:t>
-            </a:r>
+              <a:t>: 물리적 손상과 효소에 의한 분해를 막는다. 소화관 상피가 자기 소화 효소에 녹지 않는 이유 가운데 하나다.</a:t>
+            </a:r>
+          </a:p>
+          <a:p>
+            <a:pPr>
+              <a:spcAft>
+                <a:spcPts val="900"/>
+              </a:spcAft>
+            </a:pPr>
             <a:r>
               <a:rPr sz="1400" b="1" i="0">
                 <a:solidFill>
+                  <a:srgbClr val="F2B705"/>
+                </a:solidFill>
+                <a:latin typeface="Malgun Gothic"/>
+                <a:ea typeface="Malgun Gothic"/>
+                <a:cs typeface="Malgun Gothic"/>
+              </a:rPr>
+              <a:t>•  </a:t>
+            </a:r>
+            <a:r>
+              <a:rPr sz="1400" b="0" i="0">
+                <a:solidFill>
+                  <a:srgbClr val="11202B"/>
+                </a:solidFill>
+                <a:latin typeface="Malgun Gothic"/>
+                <a:ea typeface="Malgun Gothic"/>
+                <a:cs typeface="Malgun Gothic"/>
+              </a:rPr>
+              <a:t>2. </a:t>
+            </a:r>
+            <a:r>
+              <a:rPr sz="1400" b="1" i="0">
+                <a:solidFill>
                   <a:srgbClr val="11202B"/>
                 </a:solidFill>
                 <a:latin typeface="Malgun Gothic"/>
@@ -23694,11 +23723,40 @@
                 <a:ea typeface="Malgun Gothic"/>
                 <a:cs typeface="Malgun Gothic"/>
               </a:rPr>
-              <a:t>: 당 사슬이 물을 붙잡아 표면을 미끄럽게 한다. 3. </a:t>
-            </a:r>
+              <a:t>: 당 사슬이 물을 붙잡아 표면을 미끄럽게 한다.</a:t>
+            </a:r>
+          </a:p>
+          <a:p>
+            <a:pPr>
+              <a:spcAft>
+                <a:spcPts val="900"/>
+              </a:spcAft>
+            </a:pPr>
             <a:r>
               <a:rPr sz="1400" b="1" i="0">
                 <a:solidFill>
+                  <a:srgbClr val="F2B705"/>
+                </a:solidFill>
+                <a:latin typeface="Malgun Gothic"/>
+                <a:ea typeface="Malgun Gothic"/>
+                <a:cs typeface="Malgun Gothic"/>
+              </a:rPr>
+              <a:t>•  </a:t>
+            </a:r>
+            <a:r>
+              <a:rPr sz="1400" b="0" i="0">
+                <a:solidFill>
+                  <a:srgbClr val="11202B"/>
+                </a:solidFill>
+                <a:latin typeface="Malgun Gothic"/>
+                <a:ea typeface="Malgun Gothic"/>
+                <a:cs typeface="Malgun Gothic"/>
+              </a:rPr>
+              <a:t>3. </a:t>
+            </a:r>
+            <a:r>
+              <a:rPr sz="1400" b="1" i="0">
+                <a:solidFill>
                   <a:srgbClr val="11202B"/>
                 </a:solidFill>
                 <a:latin typeface="Malgun Gothic"/>
@@ -23716,7 +23774,36 @@
                 <a:ea typeface="Malgun Gothic"/>
                 <a:cs typeface="Malgun Gothic"/>
               </a:rPr>
-              <a:t>: 세포가 서로를 알아보는 표지로 쓰인다. 당 사슬은 가지를 칠 수 있어 같은 단량체로도 매우 다양한 구조를 만들 수 있으므로 표지로 적합하다(2절). 4. </a:t>
+              <a:t>: 세포가 서로를 알아보는 표지로 쓰인다. 당 사슬은 가지를 칠 수 있어 같은 단량체로도 매우 다양한 구조를 만들 수 있으므로 표지로 적합하다(2절).</a:t>
+            </a:r>
+          </a:p>
+          <a:p>
+            <a:pPr>
+              <a:spcAft>
+                <a:spcPts val="900"/>
+              </a:spcAft>
+            </a:pPr>
+            <a:r>
+              <a:rPr sz="1400" b="1" i="0">
+                <a:solidFill>
+                  <a:srgbClr val="F2B705"/>
+                </a:solidFill>
+                <a:latin typeface="Malgun Gothic"/>
+                <a:ea typeface="Malgun Gothic"/>
+                <a:cs typeface="Malgun Gothic"/>
+              </a:rPr>
+              <a:t>•  </a:t>
+            </a:r>
+            <a:r>
+              <a:rPr sz="1400" b="0" i="0">
+                <a:solidFill>
+                  <a:srgbClr val="11202B"/>
+                </a:solidFill>
+                <a:latin typeface="Malgun Gothic"/>
+                <a:ea typeface="Malgun Gothic"/>
+                <a:cs typeface="Malgun Gothic"/>
+              </a:rPr>
+              <a:t>4. </a:t>
             </a:r>
             <a:r>
               <a:rPr sz="1400" b="1" i="0">
